--- a/Schools_ML_Track/camp_2026/slides/DA/DA14.pptx
+++ b/Schools_ML_Track/camp_2026/slides/DA/DA14.pptx
@@ -129,7 +129,7 @@
   <p:extLst>
     <p:ext uri="{521415D9-36F7-43E2-AB2F-B90AF26B5E84}">
       <p14:sectionLst xmlns:p14="http://schemas.microsoft.com/office/powerpoint/2010/main">
-        <p14:section name="Opening" id="{12b027aa-107e-ea5f-6cd2-82a610fbe8c6}">
+        <p14:section name="Opening" id="{b344721f-d1c3-373a-86f2-dfa12b367df7}">
           <p14:sldIdLst>
             <p14:sldId id="256"/>
             <p14:sldId id="257"/>
@@ -140,7 +140,7 @@
             <p14:sldId id="262"/>
           </p14:sldIdLst>
         </p14:section>
-        <p14:section name="Block A" id="{d885bac9-3ce1-c465-f490-31e8bf06d9f5}">
+        <p14:section name="Block A" id="{7e3b3617-fcd0-4ab6-ff0a-81d9b2ff645b}">
           <p14:sldIdLst>
             <p14:sldId id="263"/>
             <p14:sldId id="264"/>
@@ -151,15 +151,15 @@
             <p14:sldId id="270"/>
           </p14:sldIdLst>
         </p14:section>
-        <p14:section name="Break" id="{4ad3b1cc-5315-7e01-5840-7ef47d1e81a0}">
+        <p14:section name="Break" id="{1ce486ab-928c-1cf0-8b8e-d4edd569abc0}">
           <p14:sldIdLst>
             <p14:sldId id="268"/>
           </p14:sldIdLst>
         </p14:section>
-        <p14:section name="Block A" id="{53d83a25-3d70-f5d5-fca9-0a0ffc4de149}">
+        <p14:section name="Block A" id="{528b457b-14e3-1447-618d-ef4ca1abb44a}">
           <p14:sldIdLst/>
         </p14:section>
-        <p14:section name="Block B" id="{1cf0d2b3-42d5-adcc-4ce7-988d339b1b42}">
+        <p14:section name="Block B" id="{8d337ace-8cc2-a326-9194-2b61dc6e8e58}">
           <p14:sldIdLst>
             <p14:sldId id="271"/>
             <p14:sldId id="272"/>
@@ -168,7 +168,7 @@
             <p14:sldId id="275"/>
           </p14:sldIdLst>
         </p14:section>
-        <p14:section name="Make and close" id="{0713eba5-4bc0-6f97-7a80-ee00e78c0307}">
+        <p14:section name="Make and close" id="{56e66da0-0d18-d07b-48a8-8d6834f25fac}">
           <p14:sldIdLst>
             <p14:sldId id="276"/>
             <p14:sldId id="277"/>

--- a/Schools_ML_Track/camp_2026/slides/DA/DA14.pptx
+++ b/Schools_ML_Track/camp_2026/slides/DA/DA14.pptx
@@ -129,7 +129,7 @@
   <p:extLst>
     <p:ext uri="{521415D9-36F7-43E2-AB2F-B90AF26B5E84}">
       <p14:sectionLst xmlns:p14="http://schemas.microsoft.com/office/powerpoint/2010/main">
-        <p14:section name="Opening" id="{b344721f-d1c3-373a-86f2-dfa12b367df7}">
+        <p14:section name="Opening" id="{2c42f698-a94d-a16f-db1e-283c88016511}">
           <p14:sldIdLst>
             <p14:sldId id="256"/>
             <p14:sldId id="257"/>
@@ -140,7 +140,7 @@
             <p14:sldId id="262"/>
           </p14:sldIdLst>
         </p14:section>
-        <p14:section name="Block A" id="{7e3b3617-fcd0-4ab6-ff0a-81d9b2ff645b}">
+        <p14:section name="Block A" id="{50626866-aad5-75e7-3b5a-3a5db7ec1da8}">
           <p14:sldIdLst>
             <p14:sldId id="263"/>
             <p14:sldId id="264"/>
@@ -151,15 +151,15 @@
             <p14:sldId id="270"/>
           </p14:sldIdLst>
         </p14:section>
-        <p14:section name="Break" id="{1ce486ab-928c-1cf0-8b8e-d4edd569abc0}">
+        <p14:section name="Break" id="{5a6758a8-0242-84bf-81a6-c9e03e14dead}">
           <p14:sldIdLst>
             <p14:sldId id="268"/>
           </p14:sldIdLst>
         </p14:section>
-        <p14:section name="Block A" id="{528b457b-14e3-1447-618d-ef4ca1abb44a}">
+        <p14:section name="Block A" id="{a35c8434-7b69-22ea-fa4c-2f30e8caa4d3}">
           <p14:sldIdLst/>
         </p14:section>
-        <p14:section name="Block B" id="{8d337ace-8cc2-a326-9194-2b61dc6e8e58}">
+        <p14:section name="Block B" id="{07e05cce-61da-58cc-67a6-0f5d29a60066}">
           <p14:sldIdLst>
             <p14:sldId id="271"/>
             <p14:sldId id="272"/>
@@ -168,7 +168,7 @@
             <p14:sldId id="275"/>
           </p14:sldIdLst>
         </p14:section>
-        <p14:section name="Make and close" id="{56e66da0-0d18-d07b-48a8-8d6834f25fac}">
+        <p14:section name="Make and close" id="{0d75bc2b-8ac7-5e01-617c-2c79be765963}">
           <p14:sldIdLst>
             <p14:sldId id="276"/>
             <p14:sldId id="277"/>
@@ -1208,7 +1208,7 @@
             <a:r>
               <a:rPr lang="en-US" dirty="0"/>
               <a:t>sns.boxplot draws one box for each group. The line inside the box is the median.
-This is the part where you decide. Predict which shop has the highest median sale. Write one line on paper. I will give you a minute.</a:t>
+This is the part where you decide. Predict which shop has the lowest median sale. Write one line on paper. I will give you a minute.</a:t>
             </a:r>
             <a:endParaRPr lang="en-US" dirty="0"/>
           </a:p>
@@ -2464,7 +2464,8 @@
           <a:p>
             <a:r>
               <a:rPr lang="en-US" dirty="0"/>
-              <a:t>Read this first part of the code with me before we run anything. ['sns.histplot draws a histogram from a DataFrame.', 'Name the DataFrame in data= and the column in x=.', 'A map turns branch ids into names.']</a:t>
+              <a:t>sns.histplot draws a histogram from a DataFrame. Name the DataFrame in data= and the column in x=.
+Now your guess. Predict whether the histogram is balanced or skewed to the right. Put your guess on paper now, even if you are unsure.</a:t>
             </a:r>
             <a:endParaRPr lang="en-US" dirty="0"/>
           </a:p>
@@ -2552,8 +2553,7 @@
           <a:p>
             <a:r>
               <a:rPr lang="en-US" dirty="0"/>
-              <a:t>sns.histplot draws a histogram from a DataFrame. Name the DataFrame in data= and the column in x=.
-Now your guess. Predict whether the histogram is balanced or skewed to the right. Put your guess on paper now, even if you are unsure.</a:t>
+              <a:t>Here is the rest of the code. Read it through once. Then write your guess on paper before we run anything.</a:t>
             </a:r>
             <a:endParaRPr lang="en-US" dirty="0"/>
           </a:p>
@@ -3287,7 +3287,24 @@
                 <a:ea typeface="Lato" pitchFamily="34" charset="-122"/>
                 <a:cs typeface="Lato" pitchFamily="34" charset="-120"/>
               </a:rPr>
-              <a:t>Exploring distributions with seaborn</a:t>
+              <a:t>Exploring distributions</a:t>
+            </a:r>
+            <a:endParaRPr lang="en-US" sz="5600" dirty="0"/>
+          </a:p>
+          <a:p>
+            <a:pPr algn="l" indent="0" marL="0">
+              <a:buNone/>
+            </a:pPr>
+            <a:r>
+              <a:rPr lang="en-US" sz="5600" b="1" dirty="0">
+                <a:solidFill>
+                  <a:srgbClr val="FFFFFF"/>
+                </a:solidFill>
+                <a:latin typeface="Lato" pitchFamily="34" charset="0"/>
+                <a:ea typeface="Lato" pitchFamily="34" charset="-122"/>
+                <a:cs typeface="Lato" pitchFamily="34" charset="-120"/>
+              </a:rPr>
+              <a:t>with seaborn</a:t>
             </a:r>
             <a:endParaRPr lang="en-US" sz="5600" dirty="0"/>
           </a:p>
@@ -3463,9 +3480,123 @@
           </a:p>
         </p:txBody>
       </p:sp>
+      <p:sp>
+        <p:nvSpPr>
+          <p:cNvPr id="3" name="Text 1"/>
+          <p:cNvSpPr txBox="1"/>
+          <p:nvPr/>
+        </p:nvSpPr>
+        <p:spPr>
+          <a:xfrm>
+            <a:off x="640080" y="1737360"/>
+            <a:ext cx="7498080" cy="4389120"/>
+          </a:xfrm>
+          <a:prstGeom prst="rect">
+            <a:avLst/>
+          </a:prstGeom>
+          <a:noFill/>
+          <a:ln/>
+        </p:spPr>
+        <p:txBody>
+          <a:bodyPr wrap="square" lIns="0" tIns="0" rIns="0" bIns="0" rtlCol="0" anchor="t"/>
+          <a:lstStyle/>
+          <a:p>
+            <a:pPr algn="l" indent="0" marL="0">
+              <a:lnSpc>
+                <a:spcPts val="3600"/>
+              </a:lnSpc>
+              <a:spcAft>
+                <a:spcPts val="1800"/>
+              </a:spcAft>
+              <a:buNone/>
+            </a:pPr>
+            <a:r>
+              <a:rPr lang="en-US" sz="3000" dirty="0">
+                <a:solidFill>
+                  <a:srgbClr val="111111"/>
+                </a:solidFill>
+                <a:latin typeface="Lato" pitchFamily="34" charset="0"/>
+                <a:ea typeface="Lato" pitchFamily="34" charset="-122"/>
+                <a:cs typeface="Lato" pitchFamily="34" charset="-120"/>
+              </a:rPr>
+              <a:t>The histogram is bunched at the low end with a long tail to the right.</a:t>
+            </a:r>
+            <a:endParaRPr lang="en-US" sz="3000" dirty="0"/>
+          </a:p>
+          <a:p>
+            <a:pPr algn="l" indent="0" marL="0">
+              <a:lnSpc>
+                <a:spcPts val="3600"/>
+              </a:lnSpc>
+              <a:spcAft>
+                <a:spcPts val="1800"/>
+              </a:spcAft>
+              <a:buNone/>
+            </a:pPr>
+            <a:r>
+              <a:rPr lang="en-US" sz="3000" dirty="0">
+                <a:solidFill>
+                  <a:srgbClr val="111111"/>
+                </a:solidFill>
+                <a:latin typeface="Lato" pitchFamily="34" charset="0"/>
+                <a:ea typeface="Lato" pitchFamily="34" charset="-122"/>
+                <a:cs typeface="Lato" pitchFamily="34" charset="-120"/>
+              </a:rPr>
+              <a:t>The skew is 7.3.</a:t>
+            </a:r>
+            <a:endParaRPr lang="en-US" sz="3000" dirty="0"/>
+          </a:p>
+          <a:p>
+            <a:pPr algn="l" indent="0" marL="0">
+              <a:lnSpc>
+                <a:spcPts val="3600"/>
+              </a:lnSpc>
+              <a:spcAft>
+                <a:spcPts val="1800"/>
+              </a:spcAft>
+              <a:buNone/>
+            </a:pPr>
+            <a:r>
+              <a:rPr lang="en-US" sz="3000" dirty="0">
+                <a:solidFill>
+                  <a:srgbClr val="111111"/>
+                </a:solidFill>
+                <a:latin typeface="Lato" pitchFamily="34" charset="0"/>
+                <a:ea typeface="Lato" pitchFamily="34" charset="-122"/>
+                <a:cs typeface="Lato" pitchFamily="34" charset="-120"/>
+              </a:rPr>
+              <a:t>A positive skew above 1 means a long right tail.</a:t>
+            </a:r>
+            <a:endParaRPr lang="en-US" sz="3000" dirty="0"/>
+          </a:p>
+          <a:p>
+            <a:pPr algn="l" indent="0" marL="0">
+              <a:lnSpc>
+                <a:spcPts val="3600"/>
+              </a:lnSpc>
+              <a:spcAft>
+                <a:spcPts val="1800"/>
+              </a:spcAft>
+              <a:buNone/>
+            </a:pPr>
+            <a:r>
+              <a:rPr lang="en-US" sz="3000" dirty="0">
+                <a:solidFill>
+                  <a:srgbClr val="111111"/>
+                </a:solidFill>
+                <a:latin typeface="Lato" pitchFamily="34" charset="0"/>
+                <a:ea typeface="Lato" pitchFamily="34" charset="-122"/>
+                <a:cs typeface="Lato" pitchFamily="34" charset="-120"/>
+              </a:rPr>
+              <a:t>Most sales are small and a few are large.</a:t>
+            </a:r>
+            <a:endParaRPr lang="en-US" sz="3000" dirty="0"/>
+          </a:p>
+        </p:txBody>
+      </p:sp>
       <p:pic>
         <p:nvPicPr>
-          <p:cNvPr id="3" name="Image 0" descr="The chart the code draws">    </p:cNvPr>
+          <p:cNvPr id="4" name="Image 0" descr="Compare with your guess">    </p:cNvPr>
           <p:cNvPicPr>
             <a:picLocks noChangeAspect="1"/>
           </p:cNvPicPr>
@@ -3479,128 +3610,14 @@
         </p:blipFill>
         <p:spPr>
           <a:xfrm>
-            <a:off x="640080" y="2032069"/>
-            <a:ext cx="6035040" cy="3662543"/>
+            <a:off x="8778240" y="2194560"/>
+            <a:ext cx="2377440" cy="2377440"/>
           </a:xfrm>
           <a:prstGeom prst="rect">
             <a:avLst/>
           </a:prstGeom>
         </p:spPr>
       </p:pic>
-      <p:sp>
-        <p:nvSpPr>
-          <p:cNvPr id="4" name="Text 1"/>
-          <p:cNvSpPr txBox="1"/>
-          <p:nvPr/>
-        </p:nvSpPr>
-        <p:spPr>
-          <a:xfrm>
-            <a:off x="7040880" y="1737360"/>
-            <a:ext cx="4480560" cy="4389120"/>
-          </a:xfrm>
-          <a:prstGeom prst="rect">
-            <a:avLst/>
-          </a:prstGeom>
-          <a:noFill/>
-          <a:ln/>
-        </p:spPr>
-        <p:txBody>
-          <a:bodyPr wrap="square" lIns="0" tIns="0" rIns="0" bIns="0" rtlCol="0" anchor="t"/>
-          <a:lstStyle/>
-          <a:p>
-            <a:pPr algn="l" indent="0" marL="0">
-              <a:lnSpc>
-                <a:spcPts val="3120"/>
-              </a:lnSpc>
-              <a:spcAft>
-                <a:spcPts val="1580"/>
-              </a:spcAft>
-              <a:buNone/>
-            </a:pPr>
-            <a:r>
-              <a:rPr lang="en-US" sz="2600" dirty="0">
-                <a:solidFill>
-                  <a:srgbClr val="111111"/>
-                </a:solidFill>
-                <a:latin typeface="Lato" pitchFamily="34" charset="0"/>
-                <a:ea typeface="Lato" pitchFamily="34" charset="-122"/>
-                <a:cs typeface="Lato" pitchFamily="34" charset="-120"/>
-              </a:rPr>
-              <a:t>The histogram is bunched at the low end with a long tail to the right.</a:t>
-            </a:r>
-            <a:endParaRPr lang="en-US" sz="2600" dirty="0"/>
-          </a:p>
-          <a:p>
-            <a:pPr algn="l" indent="0" marL="0">
-              <a:lnSpc>
-                <a:spcPts val="3120"/>
-              </a:lnSpc>
-              <a:spcAft>
-                <a:spcPts val="1580"/>
-              </a:spcAft>
-              <a:buNone/>
-            </a:pPr>
-            <a:r>
-              <a:rPr lang="en-US" sz="2600" dirty="0">
-                <a:solidFill>
-                  <a:srgbClr val="111111"/>
-                </a:solidFill>
-                <a:latin typeface="Lato" pitchFamily="34" charset="0"/>
-                <a:ea typeface="Lato" pitchFamily="34" charset="-122"/>
-                <a:cs typeface="Lato" pitchFamily="34" charset="-120"/>
-              </a:rPr>
-              <a:t>The skew is 7.3.</a:t>
-            </a:r>
-            <a:endParaRPr lang="en-US" sz="2600" dirty="0"/>
-          </a:p>
-          <a:p>
-            <a:pPr algn="l" indent="0" marL="0">
-              <a:lnSpc>
-                <a:spcPts val="3120"/>
-              </a:lnSpc>
-              <a:spcAft>
-                <a:spcPts val="1580"/>
-              </a:spcAft>
-              <a:buNone/>
-            </a:pPr>
-            <a:r>
-              <a:rPr lang="en-US" sz="2600" dirty="0">
-                <a:solidFill>
-                  <a:srgbClr val="111111"/>
-                </a:solidFill>
-                <a:latin typeface="Lato" pitchFamily="34" charset="0"/>
-                <a:ea typeface="Lato" pitchFamily="34" charset="-122"/>
-                <a:cs typeface="Lato" pitchFamily="34" charset="-120"/>
-              </a:rPr>
-              <a:t>A positive skew above 1 means a long right tail.</a:t>
-            </a:r>
-            <a:endParaRPr lang="en-US" sz="2600" dirty="0"/>
-          </a:p>
-          <a:p>
-            <a:pPr algn="l" indent="0" marL="0">
-              <a:lnSpc>
-                <a:spcPts val="3120"/>
-              </a:lnSpc>
-              <a:spcAft>
-                <a:spcPts val="1580"/>
-              </a:spcAft>
-              <a:buNone/>
-            </a:pPr>
-            <a:r>
-              <a:rPr lang="en-US" sz="2600" dirty="0">
-                <a:solidFill>
-                  <a:srgbClr val="111111"/>
-                </a:solidFill>
-                <a:latin typeface="Lato" pitchFamily="34" charset="0"/>
-                <a:ea typeface="Lato" pitchFamily="34" charset="-122"/>
-                <a:cs typeface="Lato" pitchFamily="34" charset="-120"/>
-              </a:rPr>
-              <a:t>Most sales are small and a few are large.</a:t>
-            </a:r>
-            <a:endParaRPr lang="en-US" sz="2600" dirty="0"/>
-          </a:p>
-        </p:txBody>
-      </p:sp>
       <p:sp>
         <p:nvSpPr>
           <p:cNvPr id="25" name="Slide Number Placeholder 0"/>
@@ -5080,7 +5097,7 @@
                 <a:ea typeface="Lato" pitchFamily="34" charset="-122"/>
                 <a:cs typeface="Lato" pitchFamily="34" charset="-120"/>
               </a:rPr>
-              <a:t>Predict which shop has the highest median sale.</a:t>
+              <a:t>Predict which shop has the lowest median sale.</a:t>
             </a:r>
             <a:endParaRPr lang="en-US" sz="2600" dirty="0"/>
           </a:p>
@@ -5247,9 +5264,77 @@
           </a:p>
         </p:txBody>
       </p:sp>
+      <p:sp>
+        <p:nvSpPr>
+          <p:cNvPr id="3" name="Text 1"/>
+          <p:cNvSpPr txBox="1"/>
+          <p:nvPr/>
+        </p:nvSpPr>
+        <p:spPr>
+          <a:xfrm>
+            <a:off x="640080" y="1737360"/>
+            <a:ext cx="7498080" cy="4389120"/>
+          </a:xfrm>
+          <a:prstGeom prst="rect">
+            <a:avLst/>
+          </a:prstGeom>
+          <a:noFill/>
+          <a:ln/>
+        </p:spPr>
+        <p:txBody>
+          <a:bodyPr wrap="square" lIns="0" tIns="0" rIns="0" bIns="0" rtlCol="0" anchor="t"/>
+          <a:lstStyle/>
+          <a:p>
+            <a:pPr algn="l" indent="0" marL="0">
+              <a:lnSpc>
+                <a:spcPts val="3600"/>
+              </a:lnSpc>
+              <a:spcAft>
+                <a:spcPts val="1800"/>
+              </a:spcAft>
+              <a:buNone/>
+            </a:pPr>
+            <a:r>
+              <a:rPr lang="en-US" sz="3000" dirty="0">
+                <a:solidFill>
+                  <a:srgbClr val="111111"/>
+                </a:solidFill>
+                <a:latin typeface="Lato" pitchFamily="34" charset="0"/>
+                <a:ea typeface="Lato" pitchFamily="34" charset="-122"/>
+                <a:cs typeface="Lato" pitchFamily="34" charset="-120"/>
+              </a:rPr>
+              <a:t>The medians are 2500 at Central Market, 2000 at Campus Gate and 2500 at Roadside.</a:t>
+            </a:r>
+            <a:endParaRPr lang="en-US" sz="3000" dirty="0"/>
+          </a:p>
+          <a:p>
+            <a:pPr algn="l" indent="0" marL="0">
+              <a:lnSpc>
+                <a:spcPts val="3600"/>
+              </a:lnSpc>
+              <a:spcAft>
+                <a:spcPts val="1800"/>
+              </a:spcAft>
+              <a:buNone/>
+            </a:pPr>
+            <a:r>
+              <a:rPr lang="en-US" sz="3000" dirty="0">
+                <a:solidFill>
+                  <a:srgbClr val="111111"/>
+                </a:solidFill>
+                <a:latin typeface="Lato" pitchFamily="34" charset="0"/>
+                <a:ea typeface="Lato" pitchFamily="34" charset="-122"/>
+                <a:cs typeface="Lato" pitchFamily="34" charset="-120"/>
+              </a:rPr>
+              <a:t>The boxes look alike and every shop has dots well above its whiskers: bulk sales happen in all three.</a:t>
+            </a:r>
+            <a:endParaRPr lang="en-US" sz="3000" dirty="0"/>
+          </a:p>
+        </p:txBody>
+      </p:sp>
       <p:pic>
         <p:nvPicPr>
-          <p:cNvPr id="3" name="Image 0" descr="The chart the code draws">    </p:cNvPr>
+          <p:cNvPr id="4" name="Image 0" descr="Compare with your guess">    </p:cNvPr>
           <p:cNvPicPr>
             <a:picLocks noChangeAspect="1"/>
           </p:cNvPicPr>
@@ -5263,82 +5348,14 @@
         </p:blipFill>
         <p:spPr>
           <a:xfrm>
-            <a:off x="640080" y="2105100"/>
-            <a:ext cx="6035040" cy="3516480"/>
+            <a:off x="8778240" y="2194560"/>
+            <a:ext cx="2377440" cy="2377440"/>
           </a:xfrm>
           <a:prstGeom prst="rect">
             <a:avLst/>
           </a:prstGeom>
         </p:spPr>
       </p:pic>
-      <p:sp>
-        <p:nvSpPr>
-          <p:cNvPr id="4" name="Text 1"/>
-          <p:cNvSpPr txBox="1"/>
-          <p:nvPr/>
-        </p:nvSpPr>
-        <p:spPr>
-          <a:xfrm>
-            <a:off x="7040880" y="1737360"/>
-            <a:ext cx="4480560" cy="4389120"/>
-          </a:xfrm>
-          <a:prstGeom prst="rect">
-            <a:avLst/>
-          </a:prstGeom>
-          <a:noFill/>
-          <a:ln/>
-        </p:spPr>
-        <p:txBody>
-          <a:bodyPr wrap="square" lIns="0" tIns="0" rIns="0" bIns="0" rtlCol="0" anchor="t"/>
-          <a:lstStyle/>
-          <a:p>
-            <a:pPr algn="l" indent="0" marL="0">
-              <a:lnSpc>
-                <a:spcPts val="3120"/>
-              </a:lnSpc>
-              <a:spcAft>
-                <a:spcPts val="1580"/>
-              </a:spcAft>
-              <a:buNone/>
-            </a:pPr>
-            <a:r>
-              <a:rPr lang="en-US" sz="2600" dirty="0">
-                <a:solidFill>
-                  <a:srgbClr val="111111"/>
-                </a:solidFill>
-                <a:latin typeface="Lato" pitchFamily="34" charset="0"/>
-                <a:ea typeface="Lato" pitchFamily="34" charset="-122"/>
-                <a:cs typeface="Lato" pitchFamily="34" charset="-120"/>
-              </a:rPr>
-              <a:t>The medians are 2500 at Central Market, 2000 at Campus Gate and 2500 at Roadside.</a:t>
-            </a:r>
-            <a:endParaRPr lang="en-US" sz="2600" dirty="0"/>
-          </a:p>
-          <a:p>
-            <a:pPr algn="l" indent="0" marL="0">
-              <a:lnSpc>
-                <a:spcPts val="3120"/>
-              </a:lnSpc>
-              <a:spcAft>
-                <a:spcPts val="1580"/>
-              </a:spcAft>
-              <a:buNone/>
-            </a:pPr>
-            <a:r>
-              <a:rPr lang="en-US" sz="2600" dirty="0">
-                <a:solidFill>
-                  <a:srgbClr val="111111"/>
-                </a:solidFill>
-                <a:latin typeface="Lato" pitchFamily="34" charset="0"/>
-                <a:ea typeface="Lato" pitchFamily="34" charset="-122"/>
-                <a:cs typeface="Lato" pitchFamily="34" charset="-120"/>
-              </a:rPr>
-              <a:t>The boxes look alike and every shop has dots well above its whiskers: bulk sales happen in all three.</a:t>
-            </a:r>
-            <a:endParaRPr lang="en-US" sz="2600" dirty="0"/>
-          </a:p>
-        </p:txBody>
-      </p:sp>
       <p:sp>
         <p:nvSpPr>
           <p:cNvPr id="25" name="Slide Number Placeholder 0"/>
@@ -5453,419 +5470,40 @@
           </a:p>
         </p:txBody>
       </p:sp>
-      <p:sp>
-        <p:nvSpPr>
-          <p:cNvPr id="3" name="Shape 1"/>
-          <p:cNvSpPr/>
+      <p:pic>
+        <p:nvPicPr>
+          <p:cNvPr id="3" name="Image 0" descr="Look closely">    </p:cNvPr>
+          <p:cNvPicPr>
+            <a:picLocks noChangeAspect="1"/>
+          </p:cNvPicPr>
           <p:nvPr/>
-        </p:nvSpPr>
-        <p:spPr>
-          <a:xfrm>
-            <a:off x="7498080" y="1737360"/>
-            <a:ext cx="4023360" cy="3410712"/>
-          </a:xfrm>
-          <a:prstGeom prst="roundRect">
-            <a:avLst>
-              <a:gd name="adj" fmla="val 2145"/>
-            </a:avLst>
-          </a:prstGeom>
-          <a:solidFill>
-            <a:srgbClr val="111111"/>
-          </a:solidFill>
-          <a:ln/>
-        </p:spPr>
-      </p:sp>
-      <p:sp>
-        <p:nvSpPr>
-          <p:cNvPr id="4" name="Text 2"/>
+        </p:nvPicPr>
+        <p:blipFill>
+          <a:blip r:embed="rId1"/>
+          <a:stretch>
+            <a:fillRect/>
+          </a:stretch>
+        </p:blipFill>
+        <p:spPr>
+          <a:xfrm>
+            <a:off x="9875520" y="4480560"/>
+            <a:ext cx="1645920" cy="1645920"/>
+          </a:xfrm>
+          <a:prstGeom prst="rect">
+            <a:avLst/>
+          </a:prstGeom>
+        </p:spPr>
+      </p:pic>
+      <p:sp>
+        <p:nvSpPr>
+          <p:cNvPr id="4" name="Text 1"/>
           <p:cNvSpPr txBox="1"/>
           <p:nvPr/>
         </p:nvSpPr>
         <p:spPr>
           <a:xfrm>
-            <a:off x="7699248" y="1938528"/>
-            <a:ext cx="3621024" cy="3008376"/>
-          </a:xfrm>
-          <a:prstGeom prst="rect">
-            <a:avLst/>
-          </a:prstGeom>
-          <a:noFill/>
-          <a:ln/>
-        </p:spPr>
-        <p:txBody>
-          <a:bodyPr wrap="square" lIns="0" tIns="0" rIns="0" bIns="0" rtlCol="0" anchor="t"/>
-          <a:lstStyle/>
-          <a:p>
-            <a:pPr algn="l" indent="0" marL="0">
-              <a:lnSpc>
-                <a:spcPts val="1950"/>
-              </a:lnSpc>
-              <a:buNone/>
-            </a:pPr>
-            <a:r>
-              <a:rPr lang="en-US" sz="1500" dirty="0">
-                <a:solidFill>
-                  <a:srgbClr val="FFFFFF"/>
-                </a:solidFill>
-                <a:latin typeface="Courier New" pitchFamily="34" charset="0"/>
-                <a:ea typeface="Courier New" pitchFamily="34" charset="-122"/>
-                <a:cs typeface="Courier New" pitchFamily="34" charset="-120"/>
-              </a:rPr>
-              <a:t>sns.boxplot(</a:t>
-            </a:r>
-            <a:endParaRPr lang="en-US" sz="1500" dirty="0"/>
-          </a:p>
-          <a:p>
-            <a:pPr algn="l" indent="0" marL="0">
-              <a:lnSpc>
-                <a:spcPts val="1950"/>
-              </a:lnSpc>
-              <a:buNone/>
-            </a:pPr>
-            <a:r>
-              <a:rPr lang="en-US" sz="1500" dirty="0">
-                <a:solidFill>
-                  <a:srgbClr val="FFFFFF"/>
-                </a:solidFill>
-                <a:latin typeface="Courier New" pitchFamily="34" charset="0"/>
-                <a:ea typeface="Courier New" pitchFamily="34" charset="-122"/>
-                <a:cs typeface="Courier New" pitchFamily="34" charset="-120"/>
-              </a:rPr>
-              <a:t>    data=sunrise, x=</a:t>
-            </a:r>
-            <a:pPr algn="l" indent="0" marL="0">
-              <a:lnSpc>
-                <a:spcPts val="1950"/>
-              </a:lnSpc>
-              <a:buNone/>
-            </a:pPr>
-            <a:r>
-              <a:rPr lang="en-US" sz="1500" dirty="0">
-                <a:solidFill>
-                  <a:srgbClr val="E0BE36"/>
-                </a:solidFill>
-                <a:latin typeface="Courier New" pitchFamily="34" charset="0"/>
-                <a:ea typeface="Courier New" pitchFamily="34" charset="-122"/>
-                <a:cs typeface="Courier New" pitchFamily="34" charset="-120"/>
-              </a:rPr>
-              <a:t>"branch"</a:t>
-            </a:r>
-            <a:pPr algn="l" indent="0" marL="0">
-              <a:lnSpc>
-                <a:spcPts val="1950"/>
-              </a:lnSpc>
-              <a:buNone/>
-            </a:pPr>
-            <a:r>
-              <a:rPr lang="en-US" sz="1500" dirty="0">
-                <a:solidFill>
-                  <a:srgbClr val="FFFFFF"/>
-                </a:solidFill>
-                <a:latin typeface="Courier New" pitchFamily="34" charset="0"/>
-                <a:ea typeface="Courier New" pitchFamily="34" charset="-122"/>
-                <a:cs typeface="Courier New" pitchFamily="34" charset="-120"/>
-              </a:rPr>
-              <a:t>,</a:t>
-            </a:r>
-            <a:endParaRPr lang="en-US" sz="1500" dirty="0"/>
-          </a:p>
-          <a:p>
-            <a:pPr algn="l" indent="0" marL="0">
-              <a:lnSpc>
-                <a:spcPts val="1950"/>
-              </a:lnSpc>
-              <a:buNone/>
-            </a:pPr>
-            <a:r>
-              <a:rPr lang="en-US" sz="1500" dirty="0">
-                <a:solidFill>
-                  <a:srgbClr val="FFFFFF"/>
-                </a:solidFill>
-                <a:latin typeface="Courier New" pitchFamily="34" charset="0"/>
-                <a:ea typeface="Courier New" pitchFamily="34" charset="-122"/>
-                <a:cs typeface="Courier New" pitchFamily="34" charset="-120"/>
-              </a:rPr>
-              <a:t>    y=</a:t>
-            </a:r>
-            <a:pPr algn="l" indent="0" marL="0">
-              <a:lnSpc>
-                <a:spcPts val="1950"/>
-              </a:lnSpc>
-              <a:buNone/>
-            </a:pPr>
-            <a:r>
-              <a:rPr lang="en-US" sz="1500" dirty="0">
-                <a:solidFill>
-                  <a:srgbClr val="E0BE36"/>
-                </a:solidFill>
-                <a:latin typeface="Courier New" pitchFamily="34" charset="0"/>
-                <a:ea typeface="Courier New" pitchFamily="34" charset="-122"/>
-                <a:cs typeface="Courier New" pitchFamily="34" charset="-120"/>
-              </a:rPr>
-              <a:t>"line_value"</a:t>
-            </a:r>
-            <a:endParaRPr lang="en-US" sz="1500" dirty="0"/>
-          </a:p>
-          <a:p>
-            <a:pPr algn="l" indent="0" marL="0">
-              <a:lnSpc>
-                <a:spcPts val="1950"/>
-              </a:lnSpc>
-              <a:buNone/>
-            </a:pPr>
-            <a:r>
-              <a:rPr lang="en-US" sz="1500" dirty="0">
-                <a:solidFill>
-                  <a:srgbClr val="FFFFFF"/>
-                </a:solidFill>
-                <a:latin typeface="Courier New" pitchFamily="34" charset="0"/>
-                <a:ea typeface="Courier New" pitchFamily="34" charset="-122"/>
-                <a:cs typeface="Courier New" pitchFamily="34" charset="-120"/>
-              </a:rPr>
-              <a:t>)</a:t>
-            </a:r>
-            <a:endParaRPr lang="en-US" sz="1500" dirty="0"/>
-          </a:p>
-          <a:p>
-            <a:pPr algn="l" indent="0" marL="0">
-              <a:lnSpc>
-                <a:spcPts val="1950"/>
-              </a:lnSpc>
-              <a:buNone/>
-            </a:pPr>
-            <a:r>
-              <a:rPr lang="en-US" sz="1500" dirty="0">
-                <a:solidFill>
-                  <a:srgbClr val="FFFFFF"/>
-                </a:solidFill>
-                <a:latin typeface="Courier New" pitchFamily="34" charset="0"/>
-                <a:ea typeface="Courier New" pitchFamily="34" charset="-122"/>
-                <a:cs typeface="Courier New" pitchFamily="34" charset="-120"/>
-              </a:rPr>
-              <a:t>plt.ylabel(</a:t>
-            </a:r>
-            <a:endParaRPr lang="en-US" sz="1500" dirty="0"/>
-          </a:p>
-          <a:p>
-            <a:pPr algn="l" indent="0" marL="0">
-              <a:lnSpc>
-                <a:spcPts val="1950"/>
-              </a:lnSpc>
-              <a:buNone/>
-            </a:pPr>
-            <a:r>
-              <a:rPr lang="en-US" sz="1500" dirty="0">
-                <a:solidFill>
-                  <a:srgbClr val="FFFFFF"/>
-                </a:solidFill>
-                <a:latin typeface="Courier New" pitchFamily="34" charset="0"/>
-                <a:ea typeface="Courier New" pitchFamily="34" charset="-122"/>
-                <a:cs typeface="Courier New" pitchFamily="34" charset="-120"/>
-              </a:rPr>
-              <a:t>    </a:t>
-            </a:r>
-            <a:pPr algn="l" indent="0" marL="0">
-              <a:lnSpc>
-                <a:spcPts val="1950"/>
-              </a:lnSpc>
-              <a:buNone/>
-            </a:pPr>
-            <a:r>
-              <a:rPr lang="en-US" sz="1500" dirty="0">
-                <a:solidFill>
-                  <a:srgbClr val="E0BE36"/>
-                </a:solidFill>
-                <a:latin typeface="Courier New" pitchFamily="34" charset="0"/>
-                <a:ea typeface="Courier New" pitchFamily="34" charset="-122"/>
-                <a:cs typeface="Courier New" pitchFamily="34" charset="-120"/>
-              </a:rPr>
-              <a:t>"Value of one sale (UGX)"</a:t>
-            </a:r>
-            <a:endParaRPr lang="en-US" sz="1500" dirty="0"/>
-          </a:p>
-          <a:p>
-            <a:pPr algn="l" indent="0" marL="0">
-              <a:lnSpc>
-                <a:spcPts val="1950"/>
-              </a:lnSpc>
-              <a:buNone/>
-            </a:pPr>
-            <a:r>
-              <a:rPr lang="en-US" sz="1500" dirty="0">
-                <a:solidFill>
-                  <a:srgbClr val="FFFFFF"/>
-                </a:solidFill>
-                <a:latin typeface="Courier New" pitchFamily="34" charset="0"/>
-                <a:ea typeface="Courier New" pitchFamily="34" charset="-122"/>
-                <a:cs typeface="Courier New" pitchFamily="34" charset="-120"/>
-              </a:rPr>
-              <a:t>)</a:t>
-            </a:r>
-            <a:endParaRPr lang="en-US" sz="1500" dirty="0"/>
-          </a:p>
-          <a:p>
-            <a:pPr algn="l" indent="0" marL="0">
-              <a:lnSpc>
-                <a:spcPts val="1950"/>
-              </a:lnSpc>
-              <a:buNone/>
-            </a:pPr>
-            <a:r>
-              <a:rPr lang="en-US" sz="1500" dirty="0">
-                <a:solidFill>
-                  <a:srgbClr val="FFFFFF"/>
-                </a:solidFill>
-                <a:latin typeface="Courier New" pitchFamily="34" charset="0"/>
-                <a:ea typeface="Courier New" pitchFamily="34" charset="-122"/>
-                <a:cs typeface="Courier New" pitchFamily="34" charset="-120"/>
-              </a:rPr>
-              <a:t>plt.show()</a:t>
-            </a:r>
-            <a:endParaRPr lang="en-US" sz="1500" dirty="0"/>
-          </a:p>
-          <a:p>
-            <a:pPr algn="l" indent="0" marL="0">
-              <a:lnSpc>
-                <a:spcPts val="1950"/>
-              </a:lnSpc>
-              <a:buNone/>
-            </a:pPr>
-            <a:r>
-              <a:rPr lang="en-US" sz="1500" dirty="0">
-                <a:solidFill>
-                  <a:srgbClr val="FFFFFF"/>
-                </a:solidFill>
-                <a:latin typeface="Courier New" pitchFamily="34" charset="0"/>
-                <a:ea typeface="Courier New" pitchFamily="34" charset="-122"/>
-                <a:cs typeface="Courier New" pitchFamily="34" charset="-120"/>
-              </a:rPr>
-              <a:t>medians = sunrise.groupby(</a:t>
-            </a:r>
-            <a:endParaRPr lang="en-US" sz="1500" dirty="0"/>
-          </a:p>
-          <a:p>
-            <a:pPr algn="l" indent="0" marL="0">
-              <a:lnSpc>
-                <a:spcPts val="1950"/>
-              </a:lnSpc>
-              <a:buNone/>
-            </a:pPr>
-            <a:r>
-              <a:rPr lang="en-US" sz="1500" dirty="0">
-                <a:solidFill>
-                  <a:srgbClr val="FFFFFF"/>
-                </a:solidFill>
-                <a:latin typeface="Courier New" pitchFamily="34" charset="0"/>
-                <a:ea typeface="Courier New" pitchFamily="34" charset="-122"/>
-                <a:cs typeface="Courier New" pitchFamily="34" charset="-120"/>
-              </a:rPr>
-              <a:t>    </a:t>
-            </a:r>
-            <a:pPr algn="l" indent="0" marL="0">
-              <a:lnSpc>
-                <a:spcPts val="1950"/>
-              </a:lnSpc>
-              <a:buNone/>
-            </a:pPr>
-            <a:r>
-              <a:rPr lang="en-US" sz="1500" dirty="0">
-                <a:solidFill>
-                  <a:srgbClr val="E0BE36"/>
-                </a:solidFill>
-                <a:latin typeface="Courier New" pitchFamily="34" charset="0"/>
-                <a:ea typeface="Courier New" pitchFamily="34" charset="-122"/>
-                <a:cs typeface="Courier New" pitchFamily="34" charset="-120"/>
-              </a:rPr>
-              <a:t>"branch"</a:t>
-            </a:r>
-            <a:endParaRPr lang="en-US" sz="1500" dirty="0"/>
-          </a:p>
-          <a:p>
-            <a:pPr algn="l" indent="0" marL="0">
-              <a:lnSpc>
-                <a:spcPts val="1950"/>
-              </a:lnSpc>
-              <a:buNone/>
-            </a:pPr>
-            <a:r>
-              <a:rPr lang="en-US" sz="1500" dirty="0">
-                <a:solidFill>
-                  <a:srgbClr val="FFFFFF"/>
-                </a:solidFill>
-                <a:latin typeface="Courier New" pitchFamily="34" charset="0"/>
-                <a:ea typeface="Courier New" pitchFamily="34" charset="-122"/>
-                <a:cs typeface="Courier New" pitchFamily="34" charset="-120"/>
-              </a:rPr>
-              <a:t>)[</a:t>
-            </a:r>
-            <a:pPr algn="l" indent="0" marL="0">
-              <a:lnSpc>
-                <a:spcPts val="1950"/>
-              </a:lnSpc>
-              <a:buNone/>
-            </a:pPr>
-            <a:r>
-              <a:rPr lang="en-US" sz="1500" dirty="0">
-                <a:solidFill>
-                  <a:srgbClr val="E0BE36"/>
-                </a:solidFill>
-                <a:latin typeface="Courier New" pitchFamily="34" charset="0"/>
-                <a:ea typeface="Courier New" pitchFamily="34" charset="-122"/>
-                <a:cs typeface="Courier New" pitchFamily="34" charset="-120"/>
-              </a:rPr>
-              <a:t>"line_value"</a:t>
-            </a:r>
-            <a:pPr algn="l" indent="0" marL="0">
-              <a:lnSpc>
-                <a:spcPts val="1950"/>
-              </a:lnSpc>
-              <a:buNone/>
-            </a:pPr>
-            <a:r>
-              <a:rPr lang="en-US" sz="1500" dirty="0">
-                <a:solidFill>
-                  <a:srgbClr val="FFFFFF"/>
-                </a:solidFill>
-                <a:latin typeface="Courier New" pitchFamily="34" charset="0"/>
-                <a:ea typeface="Courier New" pitchFamily="34" charset="-122"/>
-                <a:cs typeface="Courier New" pitchFamily="34" charset="-120"/>
-              </a:rPr>
-              <a:t>].median()</a:t>
-            </a:r>
-            <a:endParaRPr lang="en-US" sz="1500" dirty="0"/>
-          </a:p>
-          <a:p>
-            <a:pPr algn="l" indent="0" marL="0">
-              <a:lnSpc>
-                <a:spcPts val="1950"/>
-              </a:lnSpc>
-              <a:buNone/>
-            </a:pPr>
-            <a:r>
-              <a:rPr lang="en-US" sz="1500" dirty="0">
-                <a:solidFill>
-                  <a:srgbClr val="FFFFFF"/>
-                </a:solidFill>
-                <a:latin typeface="Courier New" pitchFamily="34" charset="0"/>
-                <a:ea typeface="Courier New" pitchFamily="34" charset="-122"/>
-                <a:cs typeface="Courier New" pitchFamily="34" charset="-120"/>
-              </a:rPr>
-              <a:t>print(medians)</a:t>
-            </a:r>
-            <a:endParaRPr lang="en-US" sz="1500" dirty="0"/>
-          </a:p>
-        </p:txBody>
-      </p:sp>
-      <p:sp>
-        <p:nvSpPr>
-          <p:cNvPr id="5" name="Text 3"/>
-          <p:cNvSpPr txBox="1"/>
-          <p:nvPr/>
-        </p:nvSpPr>
-        <p:spPr>
-          <a:xfrm>
             <a:off x="640080" y="1737360"/>
-            <a:ext cx="6400800" cy="4389120"/>
+            <a:ext cx="8961120" cy="4389120"/>
           </a:xfrm>
           <a:prstGeom prst="rect">
             <a:avLst/>
@@ -6651,15 +6289,15 @@
           <a:p>
             <a:pPr algn="l" indent="0" marL="0">
               <a:lnSpc>
-                <a:spcPts val="3480"/>
+                <a:spcPts val="3240"/>
               </a:lnSpc>
               <a:spcAft>
-                <a:spcPts val="2520"/>
+                <a:spcPts val="2020"/>
               </a:spcAft>
               <a:buNone/>
             </a:pPr>
             <a:r>
-              <a:rPr lang="en-US" sz="2900" dirty="0">
+              <a:rPr lang="en-US" sz="2700" dirty="0">
                 <a:solidFill>
                   <a:srgbClr val="111111"/>
                 </a:solidFill>
@@ -6667,22 +6305,22 @@
                 <a:ea typeface="Lato" pitchFamily="34" charset="-122"/>
                 <a:cs typeface="Lato" pitchFamily="34" charset="-120"/>
               </a:rPr>
-              <a:t>Explore the daily customer counts. Draw a histogram of customers_counted and a box plot of customers_counted for each branch. Write the median for each branch and one finding in a sentence.</a:t>
-            </a:r>
-            <a:endParaRPr lang="en-US" sz="2900" dirty="0"/>
-          </a:p>
-          <a:p>
-            <a:pPr algn="l" indent="0" marL="0">
-              <a:lnSpc>
-                <a:spcPts val="3480"/>
+              <a:t>Explore the daily customer counts.</a:t>
+            </a:r>
+            <a:endParaRPr lang="en-US" sz="2700" dirty="0"/>
+          </a:p>
+          <a:p>
+            <a:pPr algn="l" indent="0" marL="0">
+              <a:lnSpc>
+                <a:spcPts val="3240"/>
               </a:lnSpc>
               <a:spcAft>
-                <a:spcPts val="2520"/>
+                <a:spcPts val="2020"/>
               </a:spcAft>
               <a:buNone/>
             </a:pPr>
             <a:r>
-              <a:rPr lang="en-US" sz="2900" dirty="0">
+              <a:rPr lang="en-US" sz="2700" dirty="0">
                 <a:solidFill>
                   <a:srgbClr val="111111"/>
                 </a:solidFill>
@@ -6690,9 +6328,55 @@
                 <a:ea typeface="Lato" pitchFamily="34" charset="-122"/>
                 <a:cs typeface="Lato" pitchFamily="34" charset="-120"/>
               </a:rPr>
+              <a:t>Draw a histogram of customers_counted and a box plot of customers_counted for each branch.</a:t>
+            </a:r>
+            <a:endParaRPr lang="en-US" sz="2700" dirty="0"/>
+          </a:p>
+          <a:p>
+            <a:pPr algn="l" indent="0" marL="0">
+              <a:lnSpc>
+                <a:spcPts val="3240"/>
+              </a:lnSpc>
+              <a:spcAft>
+                <a:spcPts val="2020"/>
+              </a:spcAft>
+              <a:buNone/>
+            </a:pPr>
+            <a:r>
+              <a:rPr lang="en-US" sz="2700" dirty="0">
+                <a:solidFill>
+                  <a:srgbClr val="111111"/>
+                </a:solidFill>
+                <a:latin typeface="Lato" pitchFamily="34" charset="0"/>
+                <a:ea typeface="Lato" pitchFamily="34" charset="-122"/>
+                <a:cs typeface="Lato" pitchFamily="34" charset="-120"/>
+              </a:rPr>
+              <a:t>Write the median for each branch and one finding in a sentence.</a:t>
+            </a:r>
+            <a:endParaRPr lang="en-US" sz="2700" dirty="0"/>
+          </a:p>
+          <a:p>
+            <a:pPr algn="l" indent="0" marL="0">
+              <a:lnSpc>
+                <a:spcPts val="3240"/>
+              </a:lnSpc>
+              <a:spcAft>
+                <a:spcPts val="2020"/>
+              </a:spcAft>
+              <a:buNone/>
+            </a:pPr>
+            <a:r>
+              <a:rPr lang="en-US" sz="2700" dirty="0">
+                <a:solidFill>
+                  <a:srgbClr val="111111"/>
+                </a:solidFill>
+                <a:latin typeface="Lato" pitchFamily="34" charset="0"/>
+                <a:ea typeface="Lato" pitchFamily="34" charset="-122"/>
+                <a:cs typeface="Lato" pitchFamily="34" charset="-120"/>
+              </a:rPr>
               <a:t>Save it as DA14. Write two sentences: what you changed and how you checked it.</a:t>
             </a:r>
-            <a:endParaRPr lang="en-US" sz="2900" dirty="0"/>
+            <a:endParaRPr lang="en-US" sz="2700" dirty="0"/>
           </a:p>
         </p:txBody>
       </p:sp>
@@ -7698,158 +7382,9 @@
           </a:p>
         </p:txBody>
       </p:sp>
-      <p:sp>
-        <p:nvSpPr>
-          <p:cNvPr id="3" name="Text 1"/>
-          <p:cNvSpPr txBox="1"/>
-          <p:nvPr/>
-        </p:nvSpPr>
-        <p:spPr>
-          <a:xfrm>
-            <a:off x="2011680" y="1737360"/>
-            <a:ext cx="2926080" cy="1298448"/>
-          </a:xfrm>
-          <a:prstGeom prst="rect">
-            <a:avLst/>
-          </a:prstGeom>
-          <a:noFill/>
-          <a:ln/>
-        </p:spPr>
-        <p:txBody>
-          <a:bodyPr wrap="square" lIns="0" tIns="0" rIns="0" bIns="0" rtlCol="0" anchor="ctr"/>
-          <a:lstStyle/>
-          <a:p>
-            <a:pPr algn="l" indent="0" marL="0">
-              <a:lnSpc>
-                <a:spcPts val="4080"/>
-              </a:lnSpc>
-              <a:buNone/>
-            </a:pPr>
-            <a:r>
-              <a:rPr lang="en-US" sz="3400" b="1" dirty="0">
-                <a:solidFill>
-                  <a:srgbClr val="111111"/>
-                </a:solidFill>
-                <a:latin typeface="Lato" pitchFamily="34" charset="0"/>
-                <a:ea typeface="Lato" pitchFamily="34" charset="-122"/>
-                <a:cs typeface="Lato" pitchFamily="34" charset="-120"/>
-              </a:rPr>
-              <a:t>seaborn</a:t>
-            </a:r>
-            <a:endParaRPr lang="en-US" sz="3400" dirty="0"/>
-          </a:p>
-        </p:txBody>
-      </p:sp>
-      <p:sp>
-        <p:nvSpPr>
-          <p:cNvPr id="4" name="Text 2"/>
-          <p:cNvSpPr txBox="1"/>
-          <p:nvPr/>
-        </p:nvSpPr>
-        <p:spPr>
-          <a:xfrm>
-            <a:off x="5120640" y="1783080"/>
-            <a:ext cx="6400800" cy="868680"/>
-          </a:xfrm>
-          <a:prstGeom prst="rect">
-            <a:avLst/>
-          </a:prstGeom>
-          <a:noFill/>
-          <a:ln/>
-        </p:spPr>
-        <p:txBody>
-          <a:bodyPr wrap="square" lIns="0" tIns="0" rIns="0" bIns="0" rtlCol="0" anchor="t"/>
-          <a:lstStyle/>
-          <a:p>
-            <a:pPr algn="l" indent="0" marL="0">
-              <a:lnSpc>
-                <a:spcPts val="2640"/>
-              </a:lnSpc>
-              <a:buNone/>
-            </a:pPr>
-            <a:r>
-              <a:rPr lang="en-US" sz="2200" dirty="0">
-                <a:solidFill>
-                  <a:srgbClr val="111111"/>
-                </a:solidFill>
-                <a:latin typeface="Lato" pitchFamily="34" charset="0"/>
-                <a:ea typeface="Lato" pitchFamily="34" charset="-122"/>
-                <a:cs typeface="Lato" pitchFamily="34" charset="-120"/>
-              </a:rPr>
-              <a:t>A library that draws statistical charts. It sits on top of matplotlib and takes a DataFrame directly.</a:t>
-            </a:r>
-            <a:endParaRPr lang="en-US" sz="2200" dirty="0"/>
-          </a:p>
-        </p:txBody>
-      </p:sp>
-      <p:sp>
-        <p:nvSpPr>
-          <p:cNvPr id="5" name="Text 3"/>
-          <p:cNvSpPr txBox="1"/>
-          <p:nvPr/>
-        </p:nvSpPr>
-        <p:spPr>
-          <a:xfrm>
-            <a:off x="5120640" y="2545080"/>
-            <a:ext cx="6400800" cy="566928"/>
-          </a:xfrm>
-          <a:prstGeom prst="rect">
-            <a:avLst/>
-          </a:prstGeom>
-          <a:noFill/>
-          <a:ln/>
-        </p:spPr>
-        <p:txBody>
-          <a:bodyPr wrap="square" lIns="0" tIns="0" rIns="0" bIns="0" rtlCol="0" anchor="t"/>
-          <a:lstStyle/>
-          <a:p>
-            <a:pPr algn="l" indent="0" marL="0">
-              <a:lnSpc>
-                <a:spcPts val="2280"/>
-              </a:lnSpc>
-              <a:buNone/>
-            </a:pPr>
-            <a:r>
-              <a:rPr lang="en-US" sz="1900" i="1" dirty="0">
-                <a:solidFill>
-                  <a:srgbClr val="666666"/>
-                </a:solidFill>
-                <a:latin typeface="Lato" pitchFamily="34" charset="0"/>
-                <a:ea typeface="Lato" pitchFamily="34" charset="-122"/>
-                <a:cs typeface="Lato" pitchFamily="34" charset="-120"/>
-              </a:rPr>
-              <a:t>A set of ready-made stencils for charts.</a:t>
-            </a:r>
-            <a:endParaRPr lang="en-US" sz="1900" dirty="0"/>
-          </a:p>
-        </p:txBody>
-      </p:sp>
-      <p:sp>
-        <p:nvSpPr>
-          <p:cNvPr id="6" name="Shape 4"/>
-          <p:cNvSpPr/>
-          <p:nvPr/>
-        </p:nvSpPr>
-        <p:spPr>
-          <a:xfrm>
-            <a:off x="640080" y="3136392"/>
-            <a:ext cx="10881360" cy="0"/>
-          </a:xfrm>
-          <a:prstGeom prst="line">
-            <a:avLst/>
-          </a:prstGeom>
-          <a:noFill/>
-          <a:ln w="12700">
-            <a:solidFill>
-              <a:srgbClr val="CFCFCF"/>
-            </a:solidFill>
-            <a:prstDash val="solid"/>
-          </a:ln>
-        </p:spPr>
-      </p:sp>
       <p:pic>
         <p:nvPicPr>
-          <p:cNvPr id="7" name="Image 0" descr="exploratory analysis">    </p:cNvPr>
+          <p:cNvPr id="3" name="Image 0" descr="seaborn">    </p:cNvPr>
           <p:cNvPicPr>
             <a:picLocks noChangeAspect="1"/>
           </p:cNvPicPr>
@@ -7863,7 +7398,7 @@
         </p:blipFill>
         <p:spPr>
           <a:xfrm>
-            <a:off x="640080" y="3264408"/>
+            <a:off x="640080" y="1783080"/>
             <a:ext cx="1188720" cy="1188720"/>
           </a:xfrm>
           <a:prstGeom prst="rect">
@@ -7873,13 +7408,13 @@
       </p:pic>
       <p:sp>
         <p:nvSpPr>
-          <p:cNvPr id="8" name="Text 5"/>
+          <p:cNvPr id="4" name="Text 1"/>
           <p:cNvSpPr txBox="1"/>
           <p:nvPr/>
         </p:nvSpPr>
         <p:spPr>
           <a:xfrm>
-            <a:off x="2011680" y="3218688"/>
+            <a:off x="2011680" y="1737360"/>
             <a:ext cx="2926080" cy="1298448"/>
           </a:xfrm>
           <a:prstGeom prst="rect">
@@ -7894,12 +7429,12 @@
           <a:p>
             <a:pPr algn="l" indent="0" marL="0">
               <a:lnSpc>
-                <a:spcPts val="2880"/>
-              </a:lnSpc>
-              <a:buNone/>
-            </a:pPr>
-            <a:r>
-              <a:rPr lang="en-US" sz="2400" b="1" dirty="0">
+                <a:spcPts val="4080"/>
+              </a:lnSpc>
+              <a:buNone/>
+            </a:pPr>
+            <a:r>
+              <a:rPr lang="en-US" sz="3400" b="1" dirty="0">
                 <a:solidFill>
                   <a:srgbClr val="111111"/>
                 </a:solidFill>
@@ -7907,21 +7442,21 @@
                 <a:ea typeface="Lato" pitchFamily="34" charset="-122"/>
                 <a:cs typeface="Lato" pitchFamily="34" charset="-120"/>
               </a:rPr>
-              <a:t>exploratory analysis</a:t>
-            </a:r>
-            <a:endParaRPr lang="en-US" sz="2400" dirty="0"/>
-          </a:p>
-        </p:txBody>
-      </p:sp>
-      <p:sp>
-        <p:nvSpPr>
-          <p:cNvPr id="9" name="Text 6"/>
+              <a:t>seaborn</a:t>
+            </a:r>
+            <a:endParaRPr lang="en-US" sz="3400" dirty="0"/>
+          </a:p>
+        </p:txBody>
+      </p:sp>
+      <p:sp>
+        <p:nvSpPr>
+          <p:cNvPr id="5" name="Text 2"/>
           <p:cNvSpPr txBox="1"/>
           <p:nvPr/>
         </p:nvSpPr>
         <p:spPr>
           <a:xfrm>
-            <a:off x="5120640" y="3264408"/>
+            <a:off x="5120640" y="1783080"/>
             <a:ext cx="6400800" cy="868680"/>
           </a:xfrm>
           <a:prstGeom prst="rect">
@@ -7949,7 +7484,7 @@
                 <a:ea typeface="Lato" pitchFamily="34" charset="-122"/>
                 <a:cs typeface="Lato" pitchFamily="34" charset="-120"/>
               </a:rPr>
-              <a:t>Looking at the data from several sides to see what is there before you answer a question.</a:t>
+              <a:t>A library that draws statistical charts. It sits on top of matplotlib and takes a DataFrame directly.</a:t>
             </a:r>
             <a:endParaRPr lang="en-US" sz="2200" dirty="0"/>
           </a:p>
@@ -7957,13 +7492,13 @@
       </p:sp>
       <p:sp>
         <p:nvSpPr>
-          <p:cNvPr id="10" name="Text 7"/>
+          <p:cNvPr id="6" name="Text 3"/>
           <p:cNvSpPr txBox="1"/>
           <p:nvPr/>
         </p:nvSpPr>
         <p:spPr>
           <a:xfrm>
-            <a:off x="5120640" y="4026408"/>
+            <a:off x="5120640" y="2545080"/>
             <a:ext cx="6400800" cy="566928"/>
           </a:xfrm>
           <a:prstGeom prst="rect">
@@ -7991,7 +7526,7 @@
                 <a:ea typeface="Lato" pitchFamily="34" charset="-122"/>
                 <a:cs typeface="Lato" pitchFamily="34" charset="-120"/>
               </a:rPr>
-              <a:t>Walking round a shop before you count the stock.</a:t>
+              <a:t>A set of ready-made stencils for charts.</a:t>
             </a:r>
             <a:endParaRPr lang="en-US" sz="1900" dirty="0"/>
           </a:p>
@@ -7999,13 +7534,13 @@
       </p:sp>
       <p:sp>
         <p:nvSpPr>
-          <p:cNvPr id="11" name="Shape 8"/>
+          <p:cNvPr id="7" name="Shape 4"/>
           <p:cNvSpPr/>
           <p:nvPr/>
         </p:nvSpPr>
         <p:spPr>
           <a:xfrm>
-            <a:off x="640080" y="4617720"/>
+            <a:off x="640080" y="3136392"/>
             <a:ext cx="10881360" cy="0"/>
           </a:xfrm>
           <a:prstGeom prst="line">
@@ -8022,7 +7557,7 @@
       </p:sp>
       <p:pic>
         <p:nvPicPr>
-          <p:cNvPr id="12" name="Image 1" descr="distribution">    </p:cNvPr>
+          <p:cNvPr id="8" name="Image 1" descr="exploratory analysis">    </p:cNvPr>
           <p:cNvPicPr>
             <a:picLocks noChangeAspect="1"/>
           </p:cNvPicPr>
@@ -8036,7 +7571,7 @@
         </p:blipFill>
         <p:spPr>
           <a:xfrm>
-            <a:off x="640080" y="4745736"/>
+            <a:off x="640080" y="3264408"/>
             <a:ext cx="1188720" cy="1188720"/>
           </a:xfrm>
           <a:prstGeom prst="rect">
@@ -8046,13 +7581,13 @@
       </p:pic>
       <p:sp>
         <p:nvSpPr>
-          <p:cNvPr id="13" name="Text 9"/>
+          <p:cNvPr id="9" name="Text 5"/>
           <p:cNvSpPr txBox="1"/>
           <p:nvPr/>
         </p:nvSpPr>
         <p:spPr>
           <a:xfrm>
-            <a:off x="2011680" y="4700016"/>
+            <a:off x="2011680" y="3218688"/>
             <a:ext cx="2926080" cy="1298448"/>
           </a:xfrm>
           <a:prstGeom prst="rect">
@@ -8067,12 +7602,12 @@
           <a:p>
             <a:pPr algn="l" indent="0" marL="0">
               <a:lnSpc>
-                <a:spcPts val="3720"/>
-              </a:lnSpc>
-              <a:buNone/>
-            </a:pPr>
-            <a:r>
-              <a:rPr lang="en-US" sz="3100" b="1" dirty="0">
+                <a:spcPts val="2880"/>
+              </a:lnSpc>
+              <a:buNone/>
+            </a:pPr>
+            <a:r>
+              <a:rPr lang="en-US" sz="2400" b="1" dirty="0">
                 <a:solidFill>
                   <a:srgbClr val="111111"/>
                 </a:solidFill>
@@ -8080,21 +7615,21 @@
                 <a:ea typeface="Lato" pitchFamily="34" charset="-122"/>
                 <a:cs typeface="Lato" pitchFamily="34" charset="-120"/>
               </a:rPr>
-              <a:t>distribution</a:t>
-            </a:r>
-            <a:endParaRPr lang="en-US" sz="3100" dirty="0"/>
-          </a:p>
-        </p:txBody>
-      </p:sp>
-      <p:sp>
-        <p:nvSpPr>
-          <p:cNvPr id="14" name="Text 10"/>
+              <a:t>exploratory analysis</a:t>
+            </a:r>
+            <a:endParaRPr lang="en-US" sz="2400" dirty="0"/>
+          </a:p>
+        </p:txBody>
+      </p:sp>
+      <p:sp>
+        <p:nvSpPr>
+          <p:cNvPr id="10" name="Text 6"/>
           <p:cNvSpPr txBox="1"/>
           <p:nvPr/>
         </p:nvSpPr>
         <p:spPr>
           <a:xfrm>
-            <a:off x="5120640" y="4745736"/>
+            <a:off x="5120640" y="3264408"/>
             <a:ext cx="6400800" cy="868680"/>
           </a:xfrm>
           <a:prstGeom prst="rect">
@@ -8122,6 +7657,179 @@
                 <a:ea typeface="Lato" pitchFamily="34" charset="-122"/>
                 <a:cs typeface="Lato" pitchFamily="34" charset="-120"/>
               </a:rPr>
+              <a:t>Looking at the data from several sides to see what is there before you answer a question.</a:t>
+            </a:r>
+            <a:endParaRPr lang="en-US" sz="2200" dirty="0"/>
+          </a:p>
+        </p:txBody>
+      </p:sp>
+      <p:sp>
+        <p:nvSpPr>
+          <p:cNvPr id="11" name="Text 7"/>
+          <p:cNvSpPr txBox="1"/>
+          <p:nvPr/>
+        </p:nvSpPr>
+        <p:spPr>
+          <a:xfrm>
+            <a:off x="5120640" y="4026408"/>
+            <a:ext cx="6400800" cy="566928"/>
+          </a:xfrm>
+          <a:prstGeom prst="rect">
+            <a:avLst/>
+          </a:prstGeom>
+          <a:noFill/>
+          <a:ln/>
+        </p:spPr>
+        <p:txBody>
+          <a:bodyPr wrap="square" lIns="0" tIns="0" rIns="0" bIns="0" rtlCol="0" anchor="t"/>
+          <a:lstStyle/>
+          <a:p>
+            <a:pPr algn="l" indent="0" marL="0">
+              <a:lnSpc>
+                <a:spcPts val="2280"/>
+              </a:lnSpc>
+              <a:buNone/>
+            </a:pPr>
+            <a:r>
+              <a:rPr lang="en-US" sz="1900" i="1" dirty="0">
+                <a:solidFill>
+                  <a:srgbClr val="666666"/>
+                </a:solidFill>
+                <a:latin typeface="Lato" pitchFamily="34" charset="0"/>
+                <a:ea typeface="Lato" pitchFamily="34" charset="-122"/>
+                <a:cs typeface="Lato" pitchFamily="34" charset="-120"/>
+              </a:rPr>
+              <a:t>Walking round a shop before you count the stock.</a:t>
+            </a:r>
+            <a:endParaRPr lang="en-US" sz="1900" dirty="0"/>
+          </a:p>
+        </p:txBody>
+      </p:sp>
+      <p:sp>
+        <p:nvSpPr>
+          <p:cNvPr id="12" name="Shape 8"/>
+          <p:cNvSpPr/>
+          <p:nvPr/>
+        </p:nvSpPr>
+        <p:spPr>
+          <a:xfrm>
+            <a:off x="640080" y="4617720"/>
+            <a:ext cx="10881360" cy="0"/>
+          </a:xfrm>
+          <a:prstGeom prst="line">
+            <a:avLst/>
+          </a:prstGeom>
+          <a:noFill/>
+          <a:ln w="12700">
+            <a:solidFill>
+              <a:srgbClr val="CFCFCF"/>
+            </a:solidFill>
+            <a:prstDash val="solid"/>
+          </a:ln>
+        </p:spPr>
+      </p:sp>
+      <p:pic>
+        <p:nvPicPr>
+          <p:cNvPr id="13" name="Image 2" descr="distribution">    </p:cNvPr>
+          <p:cNvPicPr>
+            <a:picLocks noChangeAspect="1"/>
+          </p:cNvPicPr>
+          <p:nvPr/>
+        </p:nvPicPr>
+        <p:blipFill>
+          <a:blip r:embed="rId3"/>
+          <a:stretch>
+            <a:fillRect/>
+          </a:stretch>
+        </p:blipFill>
+        <p:spPr>
+          <a:xfrm>
+            <a:off x="640080" y="4745736"/>
+            <a:ext cx="1188720" cy="1188720"/>
+          </a:xfrm>
+          <a:prstGeom prst="rect">
+            <a:avLst/>
+          </a:prstGeom>
+        </p:spPr>
+      </p:pic>
+      <p:sp>
+        <p:nvSpPr>
+          <p:cNvPr id="14" name="Text 9"/>
+          <p:cNvSpPr txBox="1"/>
+          <p:nvPr/>
+        </p:nvSpPr>
+        <p:spPr>
+          <a:xfrm>
+            <a:off x="2011680" y="4700016"/>
+            <a:ext cx="2926080" cy="1298448"/>
+          </a:xfrm>
+          <a:prstGeom prst="rect">
+            <a:avLst/>
+          </a:prstGeom>
+          <a:noFill/>
+          <a:ln/>
+        </p:spPr>
+        <p:txBody>
+          <a:bodyPr wrap="square" lIns="0" tIns="0" rIns="0" bIns="0" rtlCol="0" anchor="ctr"/>
+          <a:lstStyle/>
+          <a:p>
+            <a:pPr algn="l" indent="0" marL="0">
+              <a:lnSpc>
+                <a:spcPts val="3720"/>
+              </a:lnSpc>
+              <a:buNone/>
+            </a:pPr>
+            <a:r>
+              <a:rPr lang="en-US" sz="3100" b="1" dirty="0">
+                <a:solidFill>
+                  <a:srgbClr val="111111"/>
+                </a:solidFill>
+                <a:latin typeface="Lato" pitchFamily="34" charset="0"/>
+                <a:ea typeface="Lato" pitchFamily="34" charset="-122"/>
+                <a:cs typeface="Lato" pitchFamily="34" charset="-120"/>
+              </a:rPr>
+              <a:t>distribution</a:t>
+            </a:r>
+            <a:endParaRPr lang="en-US" sz="3100" dirty="0"/>
+          </a:p>
+        </p:txBody>
+      </p:sp>
+      <p:sp>
+        <p:nvSpPr>
+          <p:cNvPr id="15" name="Text 10"/>
+          <p:cNvSpPr txBox="1"/>
+          <p:nvPr/>
+        </p:nvSpPr>
+        <p:spPr>
+          <a:xfrm>
+            <a:off x="5120640" y="4745736"/>
+            <a:ext cx="6400800" cy="868680"/>
+          </a:xfrm>
+          <a:prstGeom prst="rect">
+            <a:avLst/>
+          </a:prstGeom>
+          <a:noFill/>
+          <a:ln/>
+        </p:spPr>
+        <p:txBody>
+          <a:bodyPr wrap="square" lIns="0" tIns="0" rIns="0" bIns="0" rtlCol="0" anchor="t"/>
+          <a:lstStyle/>
+          <a:p>
+            <a:pPr algn="l" indent="0" marL="0">
+              <a:lnSpc>
+                <a:spcPts val="2640"/>
+              </a:lnSpc>
+              <a:buNone/>
+            </a:pPr>
+            <a:r>
+              <a:rPr lang="en-US" sz="2200" dirty="0">
+                <a:solidFill>
+                  <a:srgbClr val="111111"/>
+                </a:solidFill>
+                <a:latin typeface="Lato" pitchFamily="34" charset="0"/>
+                <a:ea typeface="Lato" pitchFamily="34" charset="-122"/>
+                <a:cs typeface="Lato" pitchFamily="34" charset="-120"/>
+              </a:rPr>
               <a:t>How the values of one column are spread out.</a:t>
             </a:r>
             <a:endParaRPr lang="en-US" sz="2200" dirty="0"/>
@@ -8130,7 +7838,7 @@
       </p:sp>
       <p:sp>
         <p:nvSpPr>
-          <p:cNvPr id="15" name="Text 11"/>
+          <p:cNvPr id="16" name="Text 11"/>
           <p:cNvSpPr txBox="1"/>
           <p:nvPr/>
         </p:nvSpPr>
@@ -9870,7 +9578,7 @@
                 <a:ea typeface="Lato" pitchFamily="34" charset="-122"/>
                 <a:cs typeface="Lato" pitchFamily="34" charset="-120"/>
               </a:rPr>
-              <a:t>Read the first part of the code. 5 lines. Say what each one does.</a:t>
+              <a:t>Predict whether the histogram is balanced or skewed to the right.</a:t>
             </a:r>
             <a:endParaRPr lang="en-US" sz="2400" dirty="0"/>
           </a:p>
@@ -9893,7 +9601,7 @@
                 <a:ea typeface="Lato" pitchFamily="34" charset="-122"/>
                 <a:cs typeface="Lato" pitchFamily="34" charset="-120"/>
               </a:rPr>
-              <a:t>The second part comes next.</a:t>
+              <a:t>The rest of the code is on the next slide.</a:t>
             </a:r>
             <a:endParaRPr lang="en-US" sz="2400" dirty="0"/>
           </a:p>
@@ -10532,7 +10240,7 @@
                 <a:ea typeface="Lato" pitchFamily="34" charset="-122"/>
                 <a:cs typeface="Lato" pitchFamily="34" charset="-120"/>
               </a:rPr>
-              <a:t>Predict whether the histogram is balanced or skewed to the right.</a:t>
+              <a:t>This is the rest of the code. Keep your guess in mind.</a:t>
             </a:r>
             <a:endParaRPr lang="en-US" sz="2400" dirty="0"/>
           </a:p>
